--- a/e2e/fixtures/files/deck-16x9.pptx
+++ b/e2e/fixtures/files/deck-16x9.pptx
@@ -3115,7 +3115,7 @@
           <a:lstStyle/>
           <a:p>
             <a:r>
-              <a:t>Итоги полугодия</a:t>
+              <a:t>Отчёт по договорной работе</a:t>
             </a:r>
           </a:p>
         </p:txBody>
@@ -3136,7 +3136,7 @@
           <a:lstStyle/>
           <a:p>
             <a:r>
-              <a:t>ООО «Ромашка» · январь 2026</a:t>
+              <a:t>ООО «Ромашка» · IV квартал 2024 · для внутреннего использования</a:t>
             </a:r>
           </a:p>
         </p:txBody>
@@ -3175,7 +3175,7 @@
           <a:lstStyle/>
           <a:p>
             <a:r>
-              <a:t>Раздел 9</a:t>
+              <a:t>Команда</a:t>
             </a:r>
           </a:p>
         </p:txBody>
@@ -3196,23 +3196,19 @@
           <a:lstStyle/>
           <a:p>
             <a:r>
-              <a:t>Ключевой показатель 9</a:t>
-            </a:r>
-          </a:p>
-          <a:p>
-            <a:pPr lvl="1">
-              <a:defRPr sz="1800"/>
-            </a:pPr>
-            <a:r>
-              <a:t>Пояснение 9.1</a:t>
-            </a:r>
-          </a:p>
-          <a:p>
-            <a:pPr lvl="1">
-              <a:defRPr sz="1800"/>
-            </a:pPr>
-            <a:r>
-              <a:t>Пояснение 9.2</a:t>
+              <a:t>Руководитель проекта — П. П. Петров</a:t>
+            </a:r>
+          </a:p>
+          <a:p>
+            <a:pPr lvl="1"/>
+            <a:r>
+              <a:t>Аналитик — А. В. Кузнецова</a:t>
+            </a:r>
+          </a:p>
+          <a:p>
+            <a:pPr lvl="1"/>
+            <a:r>
+              <a:t>Юрист — С. С. Сидоров</a:t>
             </a:r>
           </a:p>
         </p:txBody>
@@ -3251,48 +3247,309 @@
           <a:lstStyle/>
           <a:p>
             <a:r>
-              <a:t>Раздел 10</a:t>
-            </a:r>
-          </a:p>
-        </p:txBody>
-      </p:sp>
-      <p:sp>
-        <p:nvSpPr>
-          <p:cNvPr id="3" name="Content Placeholder 2"/>
-          <p:cNvSpPr>
-            <a:spLocks noGrp="1"/>
-          </p:cNvSpPr>
-          <p:nvPr>
-            <p:ph idx="1"/>
-          </p:nvPr>
-        </p:nvSpPr>
-        <p:spPr/>
-        <p:txBody>
-          <a:bodyPr/>
-          <a:lstStyle/>
-          <a:p>
-            <a:r>
-              <a:t>Ключевой показатель 10</a:t>
-            </a:r>
-          </a:p>
-          <a:p>
-            <a:pPr lvl="1">
-              <a:defRPr sz="1800"/>
-            </a:pPr>
-            <a:r>
-              <a:t>Пояснение 10.1</a:t>
-            </a:r>
-          </a:p>
-          <a:p>
-            <a:pPr lvl="1">
-              <a:defRPr sz="1800"/>
-            </a:pPr>
-            <a:r>
-              <a:t>Пояснение 10.2</a:t>
-            </a:r>
-          </a:p>
-        </p:txBody>
-      </p:sp>
+              <a:t>Реестр крупных договоров</a:t>
+            </a:r>
+          </a:p>
+        </p:txBody>
+      </p:sp>
+      <p:graphicFrame>
+        <p:nvGraphicFramePr>
+          <p:cNvPr id="3" name="Table 2"/>
+          <p:cNvGraphicFramePr>
+            <a:graphicFrameLocks noGrp="1"/>
+          </p:cNvGraphicFramePr>
+          <p:nvPr/>
+        </p:nvGraphicFramePr>
+        <p:xfrm>
+          <a:off x="720000" y="1440000"/>
+          <a:ext cx="10752000" cy="2880000"/>
+        </p:xfrm>
+        <a:graphic>
+          <a:graphicData uri="http://schemas.openxmlformats.org/drawingml/2006/table">
+            <a:tbl>
+              <a:tblPr firstRow="1" bandRow="1">
+                <a:tableStyleId>{5C22544A-7EE6-4342-B048-85BDC9FD1C3A}</a:tableStyleId>
+              </a:tblPr>
+              <a:tblGrid>
+                <a:gridCol w="2688000"/>
+                <a:gridCol w="2688000"/>
+                <a:gridCol w="2688000"/>
+                <a:gridCol w="2688000"/>
+              </a:tblGrid>
+              <a:tr h="576000">
+                <a:tc>
+                  <a:txBody>
+                    <a:bodyPr/>
+                    <a:lstStyle/>
+                    <a:p>
+                      <a:r>
+                        <a:rPr sz="1400"/>
+                        <a:t>Договор</a:t>
+                      </a:r>
+                    </a:p>
+                  </a:txBody>
+                  <a:tcPr/>
+                </a:tc>
+                <a:tc>
+                  <a:txBody>
+                    <a:bodyPr/>
+                    <a:lstStyle/>
+                    <a:p>
+                      <a:r>
+                        <a:rPr sz="1400"/>
+                        <a:t>Контрагент</a:t>
+                      </a:r>
+                    </a:p>
+                  </a:txBody>
+                  <a:tcPr/>
+                </a:tc>
+                <a:tc>
+                  <a:txBody>
+                    <a:bodyPr/>
+                    <a:lstStyle/>
+                    <a:p>
+                      <a:r>
+                        <a:rPr sz="1400"/>
+                        <a:t>Сумма, BYN</a:t>
+                      </a:r>
+                    </a:p>
+                  </a:txBody>
+                  <a:tcPr/>
+                </a:tc>
+                <a:tc>
+                  <a:txBody>
+                    <a:bodyPr/>
+                    <a:lstStyle/>
+                    <a:p>
+                      <a:r>
+                        <a:rPr sz="1400"/>
+                        <a:t>Статус</a:t>
+                      </a:r>
+                    </a:p>
+                  </a:txBody>
+                  <a:tcPr/>
+                </a:tc>
+              </a:tr>
+              <a:tr h="576000">
+                <a:tc>
+                  <a:txBody>
+                    <a:bodyPr/>
+                    <a:lstStyle/>
+                    <a:p>
+                      <a:r>
+                        <a:rPr sz="1400"/>
+                        <a:t>№ 17/2024</a:t>
+                      </a:r>
+                    </a:p>
+                  </a:txBody>
+                  <a:tcPr/>
+                </a:tc>
+                <a:tc>
+                  <a:txBody>
+                    <a:bodyPr/>
+                    <a:lstStyle/>
+                    <a:p>
+                      <a:r>
+                        <a:rPr sz="1400"/>
+                        <a:t>ООО «Ромашка»</a:t>
+                      </a:r>
+                    </a:p>
+                  </a:txBody>
+                  <a:tcPr/>
+                </a:tc>
+                <a:tc>
+                  <a:txBody>
+                    <a:bodyPr/>
+                    <a:lstStyle/>
+                    <a:p>
+                      <a:r>
+                        <a:rPr sz="1400"/>
+                        <a:t>12 480,00</a:t>
+                      </a:r>
+                    </a:p>
+                  </a:txBody>
+                  <a:tcPr/>
+                </a:tc>
+                <a:tc>
+                  <a:txBody>
+                    <a:bodyPr/>
+                    <a:lstStyle/>
+                    <a:p>
+                      <a:r>
+                        <a:rPr sz="1400"/>
+                        <a:t>Действует</a:t>
+                      </a:r>
+                    </a:p>
+                  </a:txBody>
+                  <a:tcPr/>
+                </a:tc>
+              </a:tr>
+              <a:tr h="576000">
+                <a:tc>
+                  <a:txBody>
+                    <a:bodyPr/>
+                    <a:lstStyle/>
+                    <a:p>
+                      <a:r>
+                        <a:rPr sz="1400"/>
+                        <a:t>№ 18/2024</a:t>
+                      </a:r>
+                    </a:p>
+                  </a:txBody>
+                  <a:tcPr/>
+                </a:tc>
+                <a:tc>
+                  <a:txBody>
+                    <a:bodyPr/>
+                    <a:lstStyle/>
+                    <a:p>
+                      <a:r>
+                        <a:rPr sz="1400"/>
+                        <a:t>ИП Иванов И. И.</a:t>
+                      </a:r>
+                    </a:p>
+                  </a:txBody>
+                  <a:tcPr/>
+                </a:tc>
+                <a:tc>
+                  <a:txBody>
+                    <a:bodyPr/>
+                    <a:lstStyle/>
+                    <a:p>
+                      <a:r>
+                        <a:rPr sz="1400"/>
+                        <a:t>15 630,00</a:t>
+                      </a:r>
+                    </a:p>
+                  </a:txBody>
+                  <a:tcPr/>
+                </a:tc>
+                <a:tc>
+                  <a:txBody>
+                    <a:bodyPr/>
+                    <a:lstStyle/>
+                    <a:p>
+                      <a:r>
+                        <a:rPr sz="1400"/>
+                        <a:t>На согласовании</a:t>
+                      </a:r>
+                    </a:p>
+                  </a:txBody>
+                  <a:tcPr/>
+                </a:tc>
+              </a:tr>
+              <a:tr h="576000">
+                <a:tc>
+                  <a:txBody>
+                    <a:bodyPr/>
+                    <a:lstStyle/>
+                    <a:p>
+                      <a:r>
+                        <a:rPr sz="1400"/>
+                        <a:t>№ 19/2024</a:t>
+                      </a:r>
+                    </a:p>
+                  </a:txBody>
+                  <a:tcPr/>
+                </a:tc>
+                <a:tc>
+                  <a:txBody>
+                    <a:bodyPr/>
+                    <a:lstStyle/>
+                    <a:p>
+                      <a:r>
+                        <a:rPr sz="1400"/>
+                        <a:t>ООО «Василёк»</a:t>
+                      </a:r>
+                    </a:p>
+                  </a:txBody>
+                  <a:tcPr/>
+                </a:tc>
+                <a:tc>
+                  <a:txBody>
+                    <a:bodyPr/>
+                    <a:lstStyle/>
+                    <a:p>
+                      <a:r>
+                        <a:rPr sz="1400"/>
+                        <a:t>18 780,00</a:t>
+                      </a:r>
+                    </a:p>
+                  </a:txBody>
+                  <a:tcPr/>
+                </a:tc>
+                <a:tc>
+                  <a:txBody>
+                    <a:bodyPr/>
+                    <a:lstStyle/>
+                    <a:p>
+                      <a:r>
+                        <a:rPr sz="1400"/>
+                        <a:t>Завершён</a:t>
+                      </a:r>
+                    </a:p>
+                  </a:txBody>
+                  <a:tcPr/>
+                </a:tc>
+              </a:tr>
+              <a:tr h="576000">
+                <a:tc>
+                  <a:txBody>
+                    <a:bodyPr/>
+                    <a:lstStyle/>
+                    <a:p>
+                      <a:r>
+                        <a:rPr sz="1400"/>
+                        <a:t>№ 20/2024</a:t>
+                      </a:r>
+                    </a:p>
+                  </a:txBody>
+                  <a:tcPr/>
+                </a:tc>
+                <a:tc>
+                  <a:txBody>
+                    <a:bodyPr/>
+                    <a:lstStyle/>
+                    <a:p>
+                      <a:r>
+                        <a:rPr sz="1400"/>
+                        <a:t>ЗАО «Тестовый Мост»</a:t>
+                      </a:r>
+                    </a:p>
+                  </a:txBody>
+                  <a:tcPr/>
+                </a:tc>
+                <a:tc>
+                  <a:txBody>
+                    <a:bodyPr/>
+                    <a:lstStyle/>
+                    <a:p>
+                      <a:r>
+                        <a:rPr sz="1400"/>
+                        <a:t>21 930,00</a:t>
+                      </a:r>
+                    </a:p>
+                  </a:txBody>
+                  <a:tcPr/>
+                </a:tc>
+                <a:tc>
+                  <a:txBody>
+                    <a:bodyPr/>
+                    <a:lstStyle/>
+                    <a:p>
+                      <a:r>
+                        <a:rPr sz="1400"/>
+                        <a:t>Продлён</a:t>
+                      </a:r>
+                    </a:p>
+                  </a:txBody>
+                  <a:tcPr/>
+                </a:tc>
+              </a:tr>
+            </a:tbl>
+          </a:graphicData>
+        </a:graphic>
+      </p:graphicFrame>
     </p:spTree>
   </p:cSld>
   <p:clrMapOvr>
@@ -3327,44 +3584,367 @@
           <a:lstStyle/>
           <a:p>
             <a:r>
-              <a:t>Раздел 11</a:t>
-            </a:r>
-          </a:p>
-        </p:txBody>
-      </p:sp>
-      <p:sp>
-        <p:nvSpPr>
-          <p:cNvPr id="3" name="Content Placeholder 2"/>
-          <p:cNvSpPr>
-            <a:spLocks noGrp="1"/>
-          </p:cNvSpPr>
-          <p:nvPr>
-            <p:ph idx="1"/>
-          </p:nvPr>
-        </p:nvSpPr>
-        <p:spPr/>
-        <p:txBody>
-          <a:bodyPr/>
-          <a:lstStyle/>
-          <a:p>
-            <a:r>
-              <a:t>Ключевой показатель 11</a:t>
-            </a:r>
-          </a:p>
-          <a:p>
-            <a:pPr lvl="1">
-              <a:defRPr sz="1800"/>
-            </a:pPr>
-            <a:r>
-              <a:t>Пояснение 11.1</a:t>
-            </a:r>
-          </a:p>
-          <a:p>
-            <a:pPr lvl="1">
-              <a:defRPr sz="1800"/>
-            </a:pPr>
-            <a:r>
-              <a:t>Пояснение 11.2</a:t>
+              <a:t>Динамика подписаний (шт.)</a:t>
+            </a:r>
+          </a:p>
+        </p:txBody>
+      </p:sp>
+      <p:sp>
+        <p:nvSpPr>
+          <p:cNvPr id="3" name="Rectangle 2"/>
+          <p:cNvSpPr/>
+          <p:nvPr/>
+        </p:nvSpPr>
+        <p:spPr>
+          <a:xfrm>
+            <a:off x="1080000" y="3168000"/>
+            <a:ext cx="792000" cy="1512000"/>
+          </a:xfrm>
+          <a:prstGeom prst="rect">
+            <a:avLst/>
+          </a:prstGeom>
+          <a:solidFill>
+            <a:srgbClr val="0F6A88"/>
+          </a:solidFill>
+          <a:ln>
+            <a:noFill/>
+          </a:ln>
+        </p:spPr>
+        <p:style>
+          <a:lnRef idx="1">
+            <a:schemeClr val="accent1"/>
+          </a:lnRef>
+          <a:fillRef idx="3">
+            <a:schemeClr val="accent1"/>
+          </a:fillRef>
+          <a:effectRef idx="2">
+            <a:schemeClr val="accent1"/>
+          </a:effectRef>
+          <a:fontRef idx="minor">
+            <a:schemeClr val="lt1"/>
+          </a:fontRef>
+        </p:style>
+        <p:txBody>
+          <a:bodyPr rtlCol="0" anchor="ctr"/>
+          <a:lstStyle/>
+          <a:p>
+            <a:pPr algn="ctr"/>
+          </a:p>
+        </p:txBody>
+      </p:sp>
+      <p:sp>
+        <p:nvSpPr>
+          <p:cNvPr id="4" name="TextBox 3"/>
+          <p:cNvSpPr txBox="1"/>
+          <p:nvPr/>
+        </p:nvSpPr>
+        <p:spPr>
+          <a:xfrm>
+            <a:off x="1080000" y="4680000"/>
+            <a:ext cx="792000" cy="360000"/>
+          </a:xfrm>
+          <a:prstGeom prst="rect">
+            <a:avLst/>
+          </a:prstGeom>
+          <a:noFill/>
+        </p:spPr>
+        <p:txBody>
+          <a:bodyPr wrap="none">
+            <a:spAutoFit/>
+          </a:bodyPr>
+          <a:lstStyle/>
+          <a:p>
+            <a:r>
+              <a:rPr sz="1100"/>
+              <a:t>Янв — 42</a:t>
+            </a:r>
+          </a:p>
+        </p:txBody>
+      </p:sp>
+      <p:sp>
+        <p:nvSpPr>
+          <p:cNvPr id="5" name="Rectangle 4"/>
+          <p:cNvSpPr/>
+          <p:nvPr/>
+        </p:nvSpPr>
+        <p:spPr>
+          <a:xfrm>
+            <a:off x="2232000" y="2232000"/>
+            <a:ext cx="792000" cy="2448000"/>
+          </a:xfrm>
+          <a:prstGeom prst="rect">
+            <a:avLst/>
+          </a:prstGeom>
+          <a:solidFill>
+            <a:srgbClr val="0F6A88"/>
+          </a:solidFill>
+          <a:ln>
+            <a:noFill/>
+          </a:ln>
+        </p:spPr>
+        <p:style>
+          <a:lnRef idx="1">
+            <a:schemeClr val="accent1"/>
+          </a:lnRef>
+          <a:fillRef idx="3">
+            <a:schemeClr val="accent1"/>
+          </a:fillRef>
+          <a:effectRef idx="2">
+            <a:schemeClr val="accent1"/>
+          </a:effectRef>
+          <a:fontRef idx="minor">
+            <a:schemeClr val="lt1"/>
+          </a:fontRef>
+        </p:style>
+        <p:txBody>
+          <a:bodyPr rtlCol="0" anchor="ctr"/>
+          <a:lstStyle/>
+          <a:p>
+            <a:pPr algn="ctr"/>
+          </a:p>
+        </p:txBody>
+      </p:sp>
+      <p:sp>
+        <p:nvSpPr>
+          <p:cNvPr id="6" name="TextBox 5"/>
+          <p:cNvSpPr txBox="1"/>
+          <p:nvPr/>
+        </p:nvSpPr>
+        <p:spPr>
+          <a:xfrm>
+            <a:off x="2232000" y="4680000"/>
+            <a:ext cx="792000" cy="360000"/>
+          </a:xfrm>
+          <a:prstGeom prst="rect">
+            <a:avLst/>
+          </a:prstGeom>
+          <a:noFill/>
+        </p:spPr>
+        <p:txBody>
+          <a:bodyPr wrap="none">
+            <a:spAutoFit/>
+          </a:bodyPr>
+          <a:lstStyle/>
+          <a:p>
+            <a:r>
+              <a:rPr sz="1100"/>
+              <a:t>Фев — 68</a:t>
+            </a:r>
+          </a:p>
+        </p:txBody>
+      </p:sp>
+      <p:sp>
+        <p:nvSpPr>
+          <p:cNvPr id="7" name="Rectangle 6"/>
+          <p:cNvSpPr/>
+          <p:nvPr/>
+        </p:nvSpPr>
+        <p:spPr>
+          <a:xfrm>
+            <a:off x="3384000" y="2700000"/>
+            <a:ext cx="792000" cy="1980000"/>
+          </a:xfrm>
+          <a:prstGeom prst="rect">
+            <a:avLst/>
+          </a:prstGeom>
+          <a:solidFill>
+            <a:srgbClr val="0F6A88"/>
+          </a:solidFill>
+          <a:ln>
+            <a:noFill/>
+          </a:ln>
+        </p:spPr>
+        <p:style>
+          <a:lnRef idx="1">
+            <a:schemeClr val="accent1"/>
+          </a:lnRef>
+          <a:fillRef idx="3">
+            <a:schemeClr val="accent1"/>
+          </a:fillRef>
+          <a:effectRef idx="2">
+            <a:schemeClr val="accent1"/>
+          </a:effectRef>
+          <a:fontRef idx="minor">
+            <a:schemeClr val="lt1"/>
+          </a:fontRef>
+        </p:style>
+        <p:txBody>
+          <a:bodyPr rtlCol="0" anchor="ctr"/>
+          <a:lstStyle/>
+          <a:p>
+            <a:pPr algn="ctr"/>
+          </a:p>
+        </p:txBody>
+      </p:sp>
+      <p:sp>
+        <p:nvSpPr>
+          <p:cNvPr id="8" name="TextBox 7"/>
+          <p:cNvSpPr txBox="1"/>
+          <p:nvPr/>
+        </p:nvSpPr>
+        <p:spPr>
+          <a:xfrm>
+            <a:off x="3384000" y="4680000"/>
+            <a:ext cx="792000" cy="360000"/>
+          </a:xfrm>
+          <a:prstGeom prst="rect">
+            <a:avLst/>
+          </a:prstGeom>
+          <a:noFill/>
+        </p:spPr>
+        <p:txBody>
+          <a:bodyPr wrap="none">
+            <a:spAutoFit/>
+          </a:bodyPr>
+          <a:lstStyle/>
+          <a:p>
+            <a:r>
+              <a:rPr sz="1100"/>
+              <a:t>Мар — 55</a:t>
+            </a:r>
+          </a:p>
+        </p:txBody>
+      </p:sp>
+      <p:sp>
+        <p:nvSpPr>
+          <p:cNvPr id="9" name="Rectangle 8"/>
+          <p:cNvSpPr/>
+          <p:nvPr/>
+        </p:nvSpPr>
+        <p:spPr>
+          <a:xfrm>
+            <a:off x="4536000" y="1404000"/>
+            <a:ext cx="792000" cy="3276000"/>
+          </a:xfrm>
+          <a:prstGeom prst="rect">
+            <a:avLst/>
+          </a:prstGeom>
+          <a:solidFill>
+            <a:srgbClr val="0F6A88"/>
+          </a:solidFill>
+          <a:ln>
+            <a:noFill/>
+          </a:ln>
+        </p:spPr>
+        <p:style>
+          <a:lnRef idx="1">
+            <a:schemeClr val="accent1"/>
+          </a:lnRef>
+          <a:fillRef idx="3">
+            <a:schemeClr val="accent1"/>
+          </a:fillRef>
+          <a:effectRef idx="2">
+            <a:schemeClr val="accent1"/>
+          </a:effectRef>
+          <a:fontRef idx="minor">
+            <a:schemeClr val="lt1"/>
+          </a:fontRef>
+        </p:style>
+        <p:txBody>
+          <a:bodyPr rtlCol="0" anchor="ctr"/>
+          <a:lstStyle/>
+          <a:p>
+            <a:pPr algn="ctr"/>
+          </a:p>
+        </p:txBody>
+      </p:sp>
+      <p:sp>
+        <p:nvSpPr>
+          <p:cNvPr id="10" name="TextBox 9"/>
+          <p:cNvSpPr txBox="1"/>
+          <p:nvPr/>
+        </p:nvSpPr>
+        <p:spPr>
+          <a:xfrm>
+            <a:off x="4536000" y="4680000"/>
+            <a:ext cx="792000" cy="360000"/>
+          </a:xfrm>
+          <a:prstGeom prst="rect">
+            <a:avLst/>
+          </a:prstGeom>
+          <a:noFill/>
+        </p:spPr>
+        <p:txBody>
+          <a:bodyPr wrap="none">
+            <a:spAutoFit/>
+          </a:bodyPr>
+          <a:lstStyle/>
+          <a:p>
+            <a:r>
+              <a:rPr sz="1100"/>
+              <a:t>Апр — 91</a:t>
+            </a:r>
+          </a:p>
+        </p:txBody>
+      </p:sp>
+      <p:sp>
+        <p:nvSpPr>
+          <p:cNvPr id="11" name="Rectangle 10"/>
+          <p:cNvSpPr/>
+          <p:nvPr/>
+        </p:nvSpPr>
+        <p:spPr>
+          <a:xfrm>
+            <a:off x="5688000" y="2016000"/>
+            <a:ext cx="792000" cy="2664000"/>
+          </a:xfrm>
+          <a:prstGeom prst="rect">
+            <a:avLst/>
+          </a:prstGeom>
+          <a:solidFill>
+            <a:srgbClr val="0F6A88"/>
+          </a:solidFill>
+          <a:ln>
+            <a:noFill/>
+          </a:ln>
+        </p:spPr>
+        <p:style>
+          <a:lnRef idx="1">
+            <a:schemeClr val="accent1"/>
+          </a:lnRef>
+          <a:fillRef idx="3">
+            <a:schemeClr val="accent1"/>
+          </a:fillRef>
+          <a:effectRef idx="2">
+            <a:schemeClr val="accent1"/>
+          </a:effectRef>
+          <a:fontRef idx="minor">
+            <a:schemeClr val="lt1"/>
+          </a:fontRef>
+        </p:style>
+        <p:txBody>
+          <a:bodyPr rtlCol="0" anchor="ctr"/>
+          <a:lstStyle/>
+          <a:p>
+            <a:pPr algn="ctr"/>
+          </a:p>
+        </p:txBody>
+      </p:sp>
+      <p:sp>
+        <p:nvSpPr>
+          <p:cNvPr id="12" name="TextBox 11"/>
+          <p:cNvSpPr txBox="1"/>
+          <p:nvPr/>
+        </p:nvSpPr>
+        <p:spPr>
+          <a:xfrm>
+            <a:off x="5688000" y="4680000"/>
+            <a:ext cx="792000" cy="360000"/>
+          </a:xfrm>
+          <a:prstGeom prst="rect">
+            <a:avLst/>
+          </a:prstGeom>
+          <a:noFill/>
+        </p:spPr>
+        <p:txBody>
+          <a:bodyPr wrap="none">
+            <a:spAutoFit/>
+          </a:bodyPr>
+          <a:lstStyle/>
+          <a:p>
+            <a:r>
+              <a:rPr sz="1100"/>
+              <a:t>Май — 74</a:t>
             </a:r>
           </a:p>
         </p:txBody>
@@ -3403,7 +3983,7 @@
           <a:lstStyle/>
           <a:p>
             <a:r>
-              <a:t>Раздел 1</a:t>
+              <a:t>Итоги квартала</a:t>
             </a:r>
           </a:p>
         </p:txBody>
@@ -3424,23 +4004,19 @@
           <a:lstStyle/>
           <a:p>
             <a:r>
-              <a:t>Ключевой показатель 1</a:t>
-            </a:r>
-          </a:p>
-          <a:p>
-            <a:pPr lvl="1">
-              <a:defRPr sz="1800"/>
-            </a:pPr>
-            <a:r>
-              <a:t>Пояснение 1.1</a:t>
-            </a:r>
-          </a:p>
-          <a:p>
-            <a:pPr lvl="1">
-              <a:defRPr sz="1800"/>
-            </a:pPr>
-            <a:r>
-              <a:t>Пояснение 1.2</a:t>
+              <a:t>Выручка выросла на 12% к предыдущему кварталу</a:t>
+            </a:r>
+          </a:p>
+          <a:p>
+            <a:pPr lvl="1"/>
+            <a:r>
+              <a:t>Подписано 8 новых договоров</a:t>
+            </a:r>
+          </a:p>
+          <a:p>
+            <a:pPr lvl="1"/>
+            <a:r>
+              <a:t>Средний срок согласования — 6 рабочих дней</a:t>
             </a:r>
           </a:p>
         </p:txBody>
@@ -3479,7 +4055,7 @@
           <a:lstStyle/>
           <a:p>
             <a:r>
-              <a:t>Раздел 2</a:t>
+              <a:t>Структура портфеля</a:t>
             </a:r>
           </a:p>
         </p:txBody>
@@ -3500,23 +4076,19 @@
           <a:lstStyle/>
           <a:p>
             <a:r>
-              <a:t>Ключевой показатель 2</a:t>
-            </a:r>
-          </a:p>
-          <a:p>
-            <a:pPr lvl="1">
-              <a:defRPr sz="1800"/>
-            </a:pPr>
-            <a:r>
-              <a:t>Пояснение 2.1</a:t>
-            </a:r>
-          </a:p>
-          <a:p>
-            <a:pPr lvl="1">
-              <a:defRPr sz="1800"/>
-            </a:pPr>
-            <a:r>
-              <a:t>Пояснение 2.2</a:t>
+              <a:t>Услуги — 54%</a:t>
+            </a:r>
+          </a:p>
+          <a:p>
+            <a:pPr lvl="1"/>
+            <a:r>
+              <a:t>Поставка — 31%</a:t>
+            </a:r>
+          </a:p>
+          <a:p>
+            <a:pPr lvl="1"/>
+            <a:r>
+              <a:t>Аренда — 15%</a:t>
             </a:r>
           </a:p>
         </p:txBody>
@@ -3555,7 +4127,7 @@
           <a:lstStyle/>
           <a:p>
             <a:r>
-              <a:t>Раздел 3</a:t>
+              <a:t>Ключевые контрагенты</a:t>
             </a:r>
           </a:p>
         </p:txBody>
@@ -3576,23 +4148,19 @@
           <a:lstStyle/>
           <a:p>
             <a:r>
-              <a:t>Ключевой показатель 3</a:t>
-            </a:r>
-          </a:p>
-          <a:p>
-            <a:pPr lvl="1">
-              <a:defRPr sz="1800"/>
-            </a:pPr>
-            <a:r>
-              <a:t>Пояснение 3.1</a:t>
-            </a:r>
-          </a:p>
-          <a:p>
-            <a:pPr lvl="1">
-              <a:defRPr sz="1800"/>
-            </a:pPr>
-            <a:r>
-              <a:t>Пояснение 3.2</a:t>
+              <a:t>ООО «Василёк»</a:t>
+            </a:r>
+          </a:p>
+          <a:p>
+            <a:pPr lvl="1"/>
+            <a:r>
+              <a:t>ЗАО «Тестовый Мост»</a:t>
+            </a:r>
+          </a:p>
+          <a:p>
+            <a:pPr lvl="1"/>
+            <a:r>
+              <a:t>ООО «ТехноСфера-Плюс»</a:t>
             </a:r>
           </a:p>
         </p:txBody>
@@ -3631,7 +4199,7 @@
           <a:lstStyle/>
           <a:p>
             <a:r>
-              <a:t>Раздел 4</a:t>
+              <a:t>Просроченная задолженность</a:t>
             </a:r>
           </a:p>
         </p:txBody>
@@ -3652,23 +4220,19 @@
           <a:lstStyle/>
           <a:p>
             <a:r>
-              <a:t>Ключевой показатель 4</a:t>
-            </a:r>
-          </a:p>
-          <a:p>
-            <a:pPr lvl="1">
-              <a:defRPr sz="1800"/>
-            </a:pPr>
-            <a:r>
-              <a:t>Пояснение 4.1</a:t>
-            </a:r>
-          </a:p>
-          <a:p>
-            <a:pPr lvl="1">
-              <a:defRPr sz="1800"/>
-            </a:pPr>
-            <a:r>
-              <a:t>Пояснение 4.2</a:t>
+              <a:t>Всего 4 договора</a:t>
+            </a:r>
+          </a:p>
+          <a:p>
+            <a:pPr lvl="1"/>
+            <a:r>
+              <a:t>Средний срок просрочки — 11 дней</a:t>
+            </a:r>
+          </a:p>
+          <a:p>
+            <a:pPr lvl="1"/>
+            <a:r>
+              <a:t>Претензионная работа начата по 3 из 4</a:t>
             </a:r>
           </a:p>
         </p:txBody>
@@ -3707,7 +4271,7 @@
           <a:lstStyle/>
           <a:p>
             <a:r>
-              <a:t>Раздел 5</a:t>
+              <a:t>Процесс согласования</a:t>
             </a:r>
           </a:p>
         </p:txBody>
@@ -3728,23 +4292,25 @@
           <a:lstStyle/>
           <a:p>
             <a:r>
-              <a:t>Ключевой показатель 5</a:t>
-            </a:r>
-          </a:p>
-          <a:p>
-            <a:pPr lvl="1">
-              <a:defRPr sz="1800"/>
-            </a:pPr>
-            <a:r>
-              <a:t>Пояснение 5.1</a:t>
-            </a:r>
-          </a:p>
-          <a:p>
-            <a:pPr lvl="1">
-              <a:defRPr sz="1800"/>
-            </a:pPr>
-            <a:r>
-              <a:t>Пояснение 5.2</a:t>
+              <a:t>Заявка</a:t>
+            </a:r>
+          </a:p>
+          <a:p>
+            <a:pPr lvl="1"/>
+            <a:r>
+              <a:t>Проверка контрагента</a:t>
+            </a:r>
+          </a:p>
+          <a:p>
+            <a:pPr lvl="1"/>
+            <a:r>
+              <a:t>Юридическая экспертиза</a:t>
+            </a:r>
+          </a:p>
+          <a:p>
+            <a:pPr lvl="1"/>
+            <a:r>
+              <a:t>Подписание</a:t>
             </a:r>
           </a:p>
         </p:txBody>
@@ -3783,7 +4349,7 @@
           <a:lstStyle/>
           <a:p>
             <a:r>
-              <a:t>Раздел 6</a:t>
+              <a:t>Риски</a:t>
             </a:r>
           </a:p>
         </p:txBody>
@@ -3804,23 +4370,19 @@
           <a:lstStyle/>
           <a:p>
             <a:r>
-              <a:t>Ключевой показатель 6</a:t>
-            </a:r>
-          </a:p>
-          <a:p>
-            <a:pPr lvl="1">
-              <a:defRPr sz="1800"/>
-            </a:pPr>
-            <a:r>
-              <a:t>Пояснение 6.1</a:t>
-            </a:r>
-          </a:p>
-          <a:p>
-            <a:pPr lvl="1">
-              <a:defRPr sz="1800"/>
-            </a:pPr>
-            <a:r>
-              <a:t>Пояснение 6.2</a:t>
+              <a:t>Зависимость от одного поставщика</a:t>
+            </a:r>
+          </a:p>
+          <a:p>
+            <a:pPr lvl="1"/>
+            <a:r>
+              <a:t>Валютные колебания</a:t>
+            </a:r>
+          </a:p>
+          <a:p>
+            <a:pPr lvl="1"/>
+            <a:r>
+              <a:t>Сроки поставки оборудования</a:t>
             </a:r>
           </a:p>
         </p:txBody>
@@ -3859,7 +4421,7 @@
           <a:lstStyle/>
           <a:p>
             <a:r>
-              <a:t>Раздел 7</a:t>
+              <a:t>План на следующий квартал</a:t>
             </a:r>
           </a:p>
         </p:txBody>
@@ -3880,23 +4442,19 @@
           <a:lstStyle/>
           <a:p>
             <a:r>
-              <a:t>Ключевой показатель 7</a:t>
-            </a:r>
-          </a:p>
-          <a:p>
-            <a:pPr lvl="1">
-              <a:defRPr sz="1800"/>
-            </a:pPr>
-            <a:r>
-              <a:t>Пояснение 7.1</a:t>
-            </a:r>
-          </a:p>
-          <a:p>
-            <a:pPr lvl="1">
-              <a:defRPr sz="1800"/>
-            </a:pPr>
-            <a:r>
-              <a:t>Пояснение 7.2</a:t>
+              <a:t>Перевести 60% договоров в электронный вид</a:t>
+            </a:r>
+          </a:p>
+          <a:p>
+            <a:pPr lvl="1"/>
+            <a:r>
+              <a:t>Сократить срок согласования до 4 дней</a:t>
+            </a:r>
+          </a:p>
+          <a:p>
+            <a:pPr lvl="1"/>
+            <a:r>
+              <a:t>Запустить реестр в общем доступе</a:t>
             </a:r>
           </a:p>
         </p:txBody>
@@ -3935,7 +4493,7 @@
           <a:lstStyle/>
           <a:p>
             <a:r>
-              <a:t>Раздел 8</a:t>
+              <a:t>Бюджет проекта</a:t>
             </a:r>
           </a:p>
         </p:txBody>
@@ -3956,23 +4514,19 @@
           <a:lstStyle/>
           <a:p>
             <a:r>
-              <a:t>Ключевой показатель 8</a:t>
-            </a:r>
-          </a:p>
-          <a:p>
-            <a:pPr lvl="1">
-              <a:defRPr sz="1800"/>
-            </a:pPr>
-            <a:r>
-              <a:t>Пояснение 8.1</a:t>
-            </a:r>
-          </a:p>
-          <a:p>
-            <a:pPr lvl="1">
-              <a:defRPr sz="1800"/>
-            </a:pPr>
-            <a:r>
-              <a:t>Пояснение 8.2</a:t>
+              <a:t>Расходы на лицензии — 18 400 BYN</a:t>
+            </a:r>
+          </a:p>
+          <a:p>
+            <a:pPr lvl="1"/>
+            <a:r>
+              <a:t>Обучение — 6 200 BYN</a:t>
+            </a:r>
+          </a:p>
+          <a:p>
+            <a:pPr lvl="1"/>
+            <a:r>
+              <a:t>Резерв — 5 000 BYN</a:t>
             </a:r>
           </a:p>
         </p:txBody>

--- a/e2e/fixtures/files/deck-16x9.pptx
+++ b/e2e/fixtures/files/deck-16x9.pptx
@@ -3983,7 +3983,7 @@
           <a:lstStyle/>
           <a:p>
             <a:r>
-              <a:t>Итоги квартала</a:t>
+              <a:t>Итоги полугодия</a:t>
             </a:r>
           </a:p>
         </p:txBody>
@@ -4003,6 +4003,12 @@
           <a:bodyPr/>
           <a:lstStyle/>
           <a:p>
+            <a:r>
+              <a:t>Раздел 1. Ключевые показатели за период</a:t>
+            </a:r>
+          </a:p>
+          <a:p>
+            <a:pPr lvl="1"/>
             <a:r>
               <a:t>Выручка выросла на 12% к предыдущему кварталу</a:t>
             </a:r>
